--- a/Lectures/BI3010 Lecture 5 LM with a categorical predictor.pptx
+++ b/Lectures/BI3010 Lecture 5 LM with a categorical predictor.pptx
@@ -225,7 +225,7 @@
           <a:p>
             <a:fld id="{19306761-C467-451A-B631-B83A8FB7E2AD}" type="datetimeFigureOut">
               <a:rPr lang="en-GB" smtClean="0"/>
-              <a:t>06/09/2024</a:t>
+              <a:t>07/10/2024</a:t>
             </a:fld>
             <a:endParaRPr lang="en-GB"/>
           </a:p>
@@ -1002,7 +1002,7 @@
           <a:p>
             <a:fld id="{7EE9FA64-2165-4ED8-BB13-AC16E72ED8FC}" type="datetimeFigureOut">
               <a:rPr lang="en-GB" smtClean="0"/>
-              <a:t>06/09/2024</a:t>
+              <a:t>07/10/2024</a:t>
             </a:fld>
             <a:endParaRPr lang="en-GB"/>
           </a:p>
@@ -1212,7 +1212,7 @@
           <a:p>
             <a:fld id="{7EE9FA64-2165-4ED8-BB13-AC16E72ED8FC}" type="datetimeFigureOut">
               <a:rPr lang="en-GB" smtClean="0"/>
-              <a:t>06/09/2024</a:t>
+              <a:t>07/10/2024</a:t>
             </a:fld>
             <a:endParaRPr lang="en-GB"/>
           </a:p>
@@ -1434,7 +1434,7 @@
           <a:p>
             <a:fld id="{7EE9FA64-2165-4ED8-BB13-AC16E72ED8FC}" type="datetimeFigureOut">
               <a:rPr lang="en-GB" smtClean="0"/>
-              <a:t>06/09/2024</a:t>
+              <a:t>07/10/2024</a:t>
             </a:fld>
             <a:endParaRPr lang="en-GB"/>
           </a:p>
@@ -1616,7 +1616,7 @@
           <a:p>
             <a:fld id="{A5C66AAF-4858-49E9-B86B-FBFED3DD34F6}" type="datetimeFigureOut">
               <a:rPr lang="en-GB" smtClean="0"/>
-              <a:t>06/09/2024</a:t>
+              <a:t>07/10/2024</a:t>
             </a:fld>
             <a:endParaRPr lang="en-GB"/>
           </a:p>
@@ -2543,7 +2543,7 @@
           <a:p>
             <a:fld id="{7EE9FA64-2165-4ED8-BB13-AC16E72ED8FC}" type="datetimeFigureOut">
               <a:rPr lang="en-GB" smtClean="0"/>
-              <a:t>06/09/2024</a:t>
+              <a:t>07/10/2024</a:t>
             </a:fld>
             <a:endParaRPr lang="en-GB"/>
           </a:p>
@@ -2685,7 +2685,7 @@
           <a:p>
             <a:fld id="{7EE9FA64-2165-4ED8-BB13-AC16E72ED8FC}" type="datetimeFigureOut">
               <a:rPr lang="en-GB" smtClean="0"/>
-              <a:t>06/09/2024</a:t>
+              <a:t>07/10/2024</a:t>
             </a:fld>
             <a:endParaRPr lang="en-GB"/>
           </a:p>
@@ -2798,7 +2798,7 @@
           <a:p>
             <a:fld id="{7EE9FA64-2165-4ED8-BB13-AC16E72ED8FC}" type="datetimeFigureOut">
               <a:rPr lang="en-GB" smtClean="0"/>
-              <a:t>06/09/2024</a:t>
+              <a:t>07/10/2024</a:t>
             </a:fld>
             <a:endParaRPr lang="en-GB"/>
           </a:p>
@@ -3111,7 +3111,7 @@
           <a:p>
             <a:fld id="{7EE9FA64-2165-4ED8-BB13-AC16E72ED8FC}" type="datetimeFigureOut">
               <a:rPr lang="en-GB" smtClean="0"/>
-              <a:t>06/09/2024</a:t>
+              <a:t>07/10/2024</a:t>
             </a:fld>
             <a:endParaRPr lang="en-GB"/>
           </a:p>
@@ -3404,7 +3404,7 @@
           <a:p>
             <a:fld id="{7EE9FA64-2165-4ED8-BB13-AC16E72ED8FC}" type="datetimeFigureOut">
               <a:rPr lang="en-GB" smtClean="0"/>
-              <a:t>06/09/2024</a:t>
+              <a:t>07/10/2024</a:t>
             </a:fld>
             <a:endParaRPr lang="en-GB"/>
           </a:p>
@@ -3647,7 +3647,7 @@
           <a:p>
             <a:fld id="{7EE9FA64-2165-4ED8-BB13-AC16E72ED8FC}" type="datetimeFigureOut">
               <a:rPr lang="en-GB" smtClean="0"/>
-              <a:t>06/09/2024</a:t>
+              <a:t>07/10/2024</a:t>
             </a:fld>
             <a:endParaRPr lang="en-GB"/>
           </a:p>
@@ -10273,8 +10273,8 @@
           </a:p>
         </p:txBody>
       </p:sp>
-      <mc:AlternateContent xmlns:mc="http://schemas.openxmlformats.org/markup-compatibility/2006">
-        <mc:Choice xmlns:a14="http://schemas.microsoft.com/office/drawing/2010/main" Requires="a14">
+      <mc:AlternateContent xmlns:mc="http://schemas.openxmlformats.org/markup-compatibility/2006" xmlns:a14="http://schemas.microsoft.com/office/drawing/2010/main">
+        <mc:Choice Requires="a14">
           <p:sp>
             <p:nvSpPr>
               <p:cNvPr id="3" name="Content Placeholder 2">
@@ -10404,7 +10404,7 @@
             </p:txBody>
           </p:sp>
         </mc:Choice>
-        <mc:Fallback>
+        <mc:Fallback xmlns="">
           <p:sp>
             <p:nvSpPr>
               <p:cNvPr id="3" name="Content Placeholder 2">
@@ -13048,8 +13048,8 @@
           </a:p>
         </p:txBody>
       </p:sp>
-      <mc:AlternateContent xmlns:mc="http://schemas.openxmlformats.org/markup-compatibility/2006">
-        <mc:Choice xmlns:a14="http://schemas.microsoft.com/office/drawing/2010/main" Requires="a14">
+      <mc:AlternateContent xmlns:mc="http://schemas.openxmlformats.org/markup-compatibility/2006" xmlns:a14="http://schemas.microsoft.com/office/drawing/2010/main">
+        <mc:Choice Requires="a14">
           <p:sp>
             <p:nvSpPr>
               <p:cNvPr id="3" name="Content Placeholder 2">
@@ -13301,7 +13301,7 @@
             </p:txBody>
           </p:sp>
         </mc:Choice>
-        <mc:Fallback>
+        <mc:Fallback xmlns="">
           <p:sp>
             <p:nvSpPr>
               <p:cNvPr id="3" name="Content Placeholder 2">
@@ -22748,8 +22748,8 @@
           </a:p>
         </p:txBody>
       </p:sp>
-      <mc:AlternateContent xmlns:mc="http://schemas.openxmlformats.org/markup-compatibility/2006">
-        <mc:Choice xmlns:a14="http://schemas.microsoft.com/office/drawing/2010/main" Requires="a14">
+      <mc:AlternateContent xmlns:mc="http://schemas.openxmlformats.org/markup-compatibility/2006" xmlns:a14="http://schemas.microsoft.com/office/drawing/2010/main">
+        <mc:Choice Requires="a14">
           <p:sp>
             <p:nvSpPr>
               <p:cNvPr id="3" name="Content Placeholder 2">
@@ -23072,7 +23072,7 @@
             </p:txBody>
           </p:sp>
         </mc:Choice>
-        <mc:Fallback>
+        <mc:Fallback xmlns="">
           <p:sp>
             <p:nvSpPr>
               <p:cNvPr id="3" name="Content Placeholder 2">
